--- a/Aula05/Aula5.pptx
+++ b/Aula05/Aula5.pptx
@@ -1790,7 +1790,7 @@
             <a:pPr rtl="0"/>
             <a:fld id="{0FE75C96-6954-4169-86C5-0628F3F633E6}" type="datetime1">
               <a:rPr lang="pt-BR" smtClean="0"/>
-              <a:t>23/02/2026</a:t>
+              <a:t>01/03/2026</a:t>
             </a:fld>
             <a:endParaRPr lang="pt-BR" dirty="0"/>
           </a:p>
@@ -1972,7 +1972,7 @@
             <a:fld id="{0E575291-0B95-4A00-9C6C-54CBD6EF268B}" type="datetime1">
               <a:rPr lang="pt-BR" smtClean="0"/>
               <a:pPr/>
-              <a:t>23/02/2026</a:t>
+              <a:t>01/03/2026</a:t>
             </a:fld>
             <a:endParaRPr lang="pt-BR" dirty="0"/>
           </a:p>
@@ -23056,8 +23056,8 @@
         </p:nvSpPr>
         <p:spPr>
           <a:xfrm>
-            <a:off x="1191610" y="2148728"/>
-            <a:ext cx="4904390" cy="2954655"/>
+            <a:off x="1191609" y="2148728"/>
+            <a:ext cx="9850201" cy="2339102"/>
           </a:xfrm>
           <a:prstGeom prst="rect">
             <a:avLst/>
@@ -24565,6 +24565,15 @@
 </file>
 
 <file path=customXml/item1.xml><?xml version="1.0" encoding="utf-8"?>
+<?mso-contentType ?>
+<FormTemplates xmlns="http://schemas.microsoft.com/sharepoint/v3/contenttype/forms">
+  <Display>DocumentLibraryForm</Display>
+  <Edit>DocumentLibraryForm</Edit>
+  <New>DocumentLibraryForm</New>
+</FormTemplates>
+</file>
+
+<file path=customXml/item2.xml><?xml version="1.0" encoding="utf-8"?>
 <p:properties xmlns:p="http://schemas.microsoft.com/office/2006/metadata/properties" xmlns:xsi="http://www.w3.org/2001/XMLSchema-instance" xmlns:pc="http://schemas.microsoft.com/office/infopath/2007/PartnerControls">
   <documentManagement>
     <_ip_UnifiedCompliancePolicyUIAction xmlns="http://schemas.microsoft.com/sharepoint/v3" xsi:nil="true"/>
@@ -24581,15 +24590,6 @@
     <MediaServiceKeyPoints xmlns="71af3243-3dd4-4a8d-8c0d-dd76da1f02a5" xsi:nil="true"/>
   </documentManagement>
 </p:properties>
-</file>
-
-<file path=customXml/item2.xml><?xml version="1.0" encoding="utf-8"?>
-<?mso-contentType ?>
-<FormTemplates xmlns="http://schemas.microsoft.com/sharepoint/v3/contenttype/forms">
-  <Display>DocumentLibraryForm</Display>
-  <Edit>DocumentLibraryForm</Edit>
-  <New>DocumentLibraryForm</New>
-</FormTemplates>
 </file>
 
 <file path=customXml/item3.xml><?xml version="1.0" encoding="utf-8"?>
@@ -24869,6 +24869,14 @@
 </file>
 
 <file path=customXml/itemProps1.xml><?xml version="1.0" encoding="utf-8"?>
+<ds:datastoreItem xmlns:ds="http://schemas.openxmlformats.org/officeDocument/2006/customXml" ds:itemID="{42BC90D6-94CF-42F7-AAC4-9CF6824C54D5}">
+  <ds:schemaRefs>
+    <ds:schemaRef ds:uri="http://schemas.microsoft.com/sharepoint/v3/contenttype/forms"/>
+  </ds:schemaRefs>
+</ds:datastoreItem>
+</file>
+
+<file path=customXml/itemProps2.xml><?xml version="1.0" encoding="utf-8"?>
 <ds:datastoreItem xmlns:ds="http://schemas.openxmlformats.org/officeDocument/2006/customXml" ds:itemID="{7F97B18F-50BC-4F30-8373-93489E845F83}">
   <ds:schemaRefs>
     <ds:schemaRef ds:uri="http://schemas.microsoft.com/office/2006/metadata/properties"/>
@@ -24876,14 +24884,6 @@
     <ds:schemaRef ds:uri="http://schemas.microsoft.com/sharepoint/v3"/>
     <ds:schemaRef ds:uri="71af3243-3dd4-4a8d-8c0d-dd76da1f02a5"/>
     <ds:schemaRef ds:uri="230e9df3-be65-4c73-a93b-d1236ebd677e"/>
-  </ds:schemaRefs>
-</ds:datastoreItem>
-</file>
-
-<file path=customXml/itemProps2.xml><?xml version="1.0" encoding="utf-8"?>
-<ds:datastoreItem xmlns:ds="http://schemas.openxmlformats.org/officeDocument/2006/customXml" ds:itemID="{42BC90D6-94CF-42F7-AAC4-9CF6824C54D5}">
-  <ds:schemaRefs>
-    <ds:schemaRef ds:uri="http://schemas.microsoft.com/sharepoint/v3/contenttype/forms"/>
   </ds:schemaRefs>
 </ds:datastoreItem>
 </file>
